--- a/Task Bodyfat/Simplified/TalkROeS/2025-09 Roes B-F_MN_20250905.pptx
+++ b/Task Bodyfat/Simplified/TalkROeS/2025-09 Roes B-F_MN_20250905.pptx
@@ -333,7 +333,7 @@
           <a:p>
             <a:fld id="{3CD0E05E-0E5F-4619-840B-04816CDCE1FF}" type="datetimeFigureOut">
               <a:rPr lang="de-AT" smtClean="0"/>
-              <a:t>04.09.2025</a:t>
+              <a:t>08.09.2025</a:t>
             </a:fld>
             <a:endParaRPr lang="de-AT"/>
           </a:p>
@@ -498,7 +498,7 @@
           <a:p>
             <a:fld id="{85C4AB0C-E262-4C0E-AFB9-E3AC8707D9BE}" type="datetimeFigureOut">
               <a:rPr lang="de-DE" smtClean="0"/>
-              <a:t>04.09.2025</a:t>
+              <a:t>08.09.2025</a:t>
             </a:fld>
             <a:endParaRPr lang="de-DE"/>
           </a:p>
@@ -12138,7 +12138,15 @@
             </a:r>
             <a:r>
               <a:rPr lang="en-US" sz="1700" dirty="0"/>
-              <a:t> Accounts directly for variable selection uncertainty via the reference model →  the projected posterior for, for the final </a:t>
+              <a:t> Accounts directly for variable selection uncertainty via the reference model →  the projected </a:t>
+            </a:r>
+            <a:r>
+              <a:rPr lang="en-US" sz="1700"/>
+              <a:t>posterior for </a:t>
+            </a:r>
+            <a:r>
+              <a:rPr lang="en-US" sz="1700" dirty="0"/>
+              <a:t>the final </a:t>
             </a:r>
             <a:r>
               <a:rPr lang="en-US" sz="1700" dirty="0" err="1"/>

--- a/Task Bodyfat/Simplified/TalkROeS/2025-09 Roes B-F_MN_20250905.pptx
+++ b/Task Bodyfat/Simplified/TalkROeS/2025-09 Roes B-F_MN_20250905.pptx
@@ -333,7 +333,7 @@
           <a:p>
             <a:fld id="{3CD0E05E-0E5F-4619-840B-04816CDCE1FF}" type="datetimeFigureOut">
               <a:rPr lang="de-AT" smtClean="0"/>
-              <a:t>08.09.2025</a:t>
+              <a:t>09.09.2025</a:t>
             </a:fld>
             <a:endParaRPr lang="de-AT"/>
           </a:p>
@@ -498,7 +498,7 @@
           <a:p>
             <a:fld id="{85C4AB0C-E262-4C0E-AFB9-E3AC8707D9BE}" type="datetimeFigureOut">
               <a:rPr lang="de-DE" smtClean="0"/>
-              <a:t>08.09.2025</a:t>
+              <a:t>09.09.2025</a:t>
             </a:fld>
             <a:endParaRPr lang="de-DE"/>
           </a:p>
@@ -11651,7 +11651,11 @@
             </a:r>
             <a:r>
               <a:rPr lang="en-US" b="1" dirty="0"/>
-              <a:t>and feature selection (</a:t>
+              <a:t>and feature selection (R-package</a:t>
+            </a:r>
+            <a:r>
+              <a:rPr lang="en-US" dirty="0"/>
+              <a:t> </a:t>
             </a:r>
             <a:r>
               <a:rPr lang="en-US" b="1" dirty="0" err="1"/>
@@ -11749,7 +11753,7 @@
         <p:spPr/>
         <p:txBody>
           <a:bodyPr>
-            <a:normAutofit lnSpcReduction="10000"/>
+            <a:normAutofit/>
           </a:bodyPr>
           <a:lstStyle/>
           <a:p>
@@ -11757,23 +11761,23 @@
               <a:buNone/>
             </a:pPr>
             <a:r>
-              <a:rPr lang="en-US" sz="1700" dirty="0"/>
-              <a:t>Many traditional approaches attempt to solve prediction and feature selection simultaneously.  </a:t>
-            </a:r>
-            <a:r>
-              <a:rPr lang="en-US" sz="1700" dirty="0" err="1">
+              <a:rPr lang="en-US" sz="1800" dirty="0"/>
+              <a:t>Many traditional approaches attempt to solve prediction and feature selection simultaneously.  R-package </a:t>
+            </a:r>
+            <a:r>
+              <a:rPr lang="en-US" sz="1800" dirty="0" err="1">
                 <a:latin typeface="Bahnschrift Light" panose="020B0502040204020203" pitchFamily="34" charset="0"/>
               </a:rPr>
               <a:t>projpred</a:t>
             </a:r>
             <a:r>
-              <a:rPr lang="en-US" sz="1700" dirty="0"/>
+              <a:rPr lang="en-US" sz="1800" dirty="0"/>
               <a:t> proposes a decision theoretic two-stage approach:</a:t>
             </a:r>
           </a:p>
           <a:p>
             <a:r>
-              <a:rPr lang="en-US" sz="1700" u="sng" dirty="0"/>
+              <a:rPr lang="en-US" sz="1800" u="sng" dirty="0"/>
               <a:t>Stage 1: Researcher builds a Reference Model </a:t>
             </a:r>
           </a:p>
@@ -11782,7 +11786,7 @@
               <a:buNone/>
             </a:pPr>
             <a:r>
-              <a:rPr lang="en-US" sz="1700" dirty="0"/>
+              <a:rPr lang="en-US" sz="1800" dirty="0"/>
               <a:t>- Fit the best possible predictive model using all relevant features  -&gt; validate this model </a:t>
             </a:r>
           </a:p>
@@ -11791,13 +11795,13 @@
               <a:buNone/>
             </a:pPr>
             <a:r>
-              <a:rPr lang="en-US" sz="1700" dirty="0"/>
+              <a:rPr lang="en-US" sz="1800" dirty="0"/>
               <a:t>- This model serves as the reference for later comparisons</a:t>
             </a:r>
           </a:p>
           <a:p>
             <a:r>
-              <a:rPr lang="en-US" sz="1700" u="sng" dirty="0"/>
+              <a:rPr lang="en-US" sz="1800" u="sng" dirty="0"/>
               <a:t>Stage 2: Algorithm finds a Minimal Subset of Features that Characterize the Predictions (Predictive Projection)</a:t>
             </a:r>
           </a:p>
@@ -11806,7 +11810,7 @@
               <a:buNone/>
             </a:pPr>
             <a:r>
-              <a:rPr lang="en-US" sz="1700" dirty="0"/>
+              <a:rPr lang="en-US" sz="1800" dirty="0"/>
               <a:t>- Select the model with the smallest predictive discrepancy to the reference  (final model)</a:t>
             </a:r>
           </a:p>
@@ -11815,72 +11819,13 @@
               <a:buNone/>
             </a:pPr>
             <a:r>
-              <a:rPr lang="en-US" sz="1700" dirty="0"/>
+              <a:rPr lang="en-US" sz="1800" dirty="0"/>
               <a:t>- For each level of complexity (number of features), finds the best-performing subset</a:t>
             </a:r>
-          </a:p>
-          <a:p>
-            <a:r>
-              <a:rPr lang="de-AT" sz="1700" u="sng" dirty="0"/>
-              <a:t>Benefits </a:t>
-            </a:r>
-            <a:r>
-              <a:rPr lang="de-AT" sz="1700" u="sng" dirty="0" err="1"/>
-              <a:t>of</a:t>
-            </a:r>
-            <a:r>
-              <a:rPr lang="de-AT" sz="1700" u="sng" dirty="0"/>
-              <a:t> This </a:t>
-            </a:r>
-            <a:r>
-              <a:rPr lang="de-AT" sz="1700" u="sng" dirty="0" err="1"/>
-              <a:t>Strategy</a:t>
-            </a:r>
-            <a:endParaRPr lang="de-AT" sz="1700" u="sng" dirty="0"/>
           </a:p>
           <a:p>
             <a:pPr marL="0" indent="0">
               <a:buNone/>
-            </a:pPr>
-            <a:r>
-              <a:rPr lang="de-AT" sz="1700" dirty="0"/>
-              <a:t>- Separates </a:t>
-            </a:r>
-            <a:r>
-              <a:rPr lang="de-AT" sz="1700" dirty="0" err="1"/>
-              <a:t>prediction</a:t>
-            </a:r>
-            <a:r>
-              <a:rPr lang="de-AT" sz="1700" dirty="0"/>
-              <a:t> </a:t>
-            </a:r>
-            <a:r>
-              <a:rPr lang="de-AT" sz="1700" dirty="0" err="1"/>
-              <a:t>from</a:t>
-            </a:r>
-            <a:r>
-              <a:rPr lang="de-AT" sz="1700" dirty="0"/>
-              <a:t> </a:t>
-            </a:r>
-            <a:r>
-              <a:rPr lang="de-AT" sz="1700" dirty="0" err="1"/>
-              <a:t>selection</a:t>
-            </a:r>
-            <a:endParaRPr lang="de-AT" sz="1700" dirty="0"/>
-          </a:p>
-          <a:p>
-            <a:pPr marL="0" indent="0">
-              <a:buNone/>
-            </a:pPr>
-            <a:r>
-              <a:rPr lang="en-US" sz="1700" dirty="0"/>
-              <a:t>- Empirically strong performance: balances sparsity and predictive accuracy</a:t>
-            </a:r>
-          </a:p>
-          <a:p>
-            <a:pPr>
-              <a:buFontTx/>
-              <a:buChar char="-"/>
             </a:pPr>
             <a:endParaRPr lang="en-US" sz="1700" dirty="0"/>
           </a:p>
@@ -12060,7 +12005,15 @@
             </a:r>
             <a:r>
               <a:rPr lang="en-US" sz="1800" b="1" dirty="0"/>
-              <a:t> offers LOO-L1 strategy using elastic net with relaxation—closely aligned with relaxed Lasso and the original analysis. See: </a:t>
+              <a:t> offers LOO-L1 strategy using elastic net </a:t>
+            </a:r>
+            <a:r>
+              <a:rPr lang="en-US" sz="1800" b="1"/>
+              <a:t>with relaxation- closely </a:t>
+            </a:r>
+            <a:r>
+              <a:rPr lang="en-US" sz="1800" b="1" dirty="0"/>
+              <a:t>aligned with relaxed Lasso and the original analysis. See: </a:t>
             </a:r>
             <a:r>
               <a:rPr lang="en-US" sz="1800" b="1" dirty="0" err="1"/>
@@ -12138,15 +12091,7 @@
             </a:r>
             <a:r>
               <a:rPr lang="en-US" sz="1700" dirty="0"/>
-              <a:t> Accounts directly for variable selection uncertainty via the reference model →  the projected </a:t>
-            </a:r>
-            <a:r>
-              <a:rPr lang="en-US" sz="1700"/>
-              <a:t>posterior for </a:t>
-            </a:r>
-            <a:r>
-              <a:rPr lang="en-US" sz="1700" dirty="0"/>
-              <a:t>the final </a:t>
+              <a:t> Accounts directly for variable selection uncertainty via the reference model →  the projected posterior for the final </a:t>
             </a:r>
             <a:r>
               <a:rPr lang="en-US" sz="1700" dirty="0" err="1"/>

--- a/Task Bodyfat/Simplified/TalkROeS/2025-09 Roes B-F_MN_20250905.pptx
+++ b/Task Bodyfat/Simplified/TalkROeS/2025-09 Roes B-F_MN_20250905.pptx
@@ -164,24 +164,17 @@
       </p:ext>
     </p:extLst>
   </p:cmAuthor>
+  <p:cmAuthor id="3" name="Georg Heinze" initials="GH" lastIdx="1" clrIdx="2">
+    <p:extLst>
+      <p:ext uri="{19B8F6BF-5375-455C-9EA6-DF929625EA0E}">
+        <p15:presenceInfo xmlns:p15="http://schemas.microsoft.com/office/powerpoint/2012/main" userId="Georg Heinze" providerId="None"/>
+      </p:ext>
+    </p:extLst>
+  </p:cmAuthor>
 </p:cmAuthorLst>
 </file>
 
 <file path=ppt/comments/comment1.xml><?xml version="1.0" encoding="utf-8"?>
-<p:cmLst xmlns:a="http://schemas.openxmlformats.org/drawingml/2006/main" xmlns:r="http://schemas.openxmlformats.org/officeDocument/2006/relationships" xmlns:p="http://schemas.openxmlformats.org/presentationml/2006/main">
-  <p:cm authorId="2" dt="2025-08-21T09:10:51.645" idx="1">
-    <p:pos x="5091" y="1779"/>
-    <p:text/>
-    <p:extLst>
-      <p:ext uri="{C676402C-5697-4E1C-873F-D02D1690AC5C}">
-        <p15:threadingInfo xmlns:p15="http://schemas.microsoft.com/office/powerpoint/2012/main" timeZoneBias="-120"/>
-      </p:ext>
-    </p:extLst>
-  </p:cm>
-</p:cmLst>
-</file>
-
-<file path=ppt/comments/comment2.xml><?xml version="1.0" encoding="utf-8"?>
 <p:cmLst xmlns:a="http://schemas.openxmlformats.org/drawingml/2006/main" xmlns:r="http://schemas.openxmlformats.org/officeDocument/2006/relationships" xmlns:p="http://schemas.openxmlformats.org/presentationml/2006/main">
   <p:cm authorId="2" dt="2025-08-21T09:15:03.998" idx="2">
     <p:pos x="5274" y="2832"/>
@@ -195,21 +188,7 @@
 </p:cmLst>
 </file>
 
-<file path=ppt/comments/comment3.xml><?xml version="1.0" encoding="utf-8"?>
-<p:cmLst xmlns:a="http://schemas.openxmlformats.org/drawingml/2006/main" xmlns:r="http://schemas.openxmlformats.org/officeDocument/2006/relationships" xmlns:p="http://schemas.openxmlformats.org/presentationml/2006/main">
-  <p:cm authorId="2" dt="2025-08-21T09:17:05.822" idx="3">
-    <p:pos x="2256" y="2400"/>
-    <p:text/>
-    <p:extLst>
-      <p:ext uri="{C676402C-5697-4E1C-873F-D02D1690AC5C}">
-        <p15:threadingInfo xmlns:p15="http://schemas.microsoft.com/office/powerpoint/2012/main" timeZoneBias="-120"/>
-      </p:ext>
-    </p:extLst>
-  </p:cm>
-</p:cmLst>
-</file>
-
-<file path=ppt/comments/comment4.xml><?xml version="1.0" encoding="utf-8"?>
+<file path=ppt/comments/comment2.xml><?xml version="1.0" encoding="utf-8"?>
 <p:cmLst xmlns:a="http://schemas.openxmlformats.org/drawingml/2006/main" xmlns:r="http://schemas.openxmlformats.org/officeDocument/2006/relationships" xmlns:p="http://schemas.openxmlformats.org/presentationml/2006/main">
   <p:cm authorId="2" dt="2025-08-21T09:19:25.833" idx="4">
     <p:pos x="1170" y="1398"/>
@@ -220,28 +199,25 @@
       </p:ext>
     </p:extLst>
   </p:cm>
-</p:cmLst>
-</file>
-
-<file path=ppt/comments/comment5.xml><?xml version="1.0" encoding="utf-8"?>
-<p:cmLst xmlns:a="http://schemas.openxmlformats.org/drawingml/2006/main" xmlns:r="http://schemas.openxmlformats.org/officeDocument/2006/relationships" xmlns:p="http://schemas.openxmlformats.org/presentationml/2006/main">
-  <p:cm authorId="2" dt="2025-08-21T09:34:54.586" idx="5">
-    <p:pos x="10" y="10"/>
-    <p:text>Vielleicht könntest du die Formel die rauskommt angeben, als ein zentrales Ergebnis, dass man dann gut mit meinem Ergebnis vergleichen kann?</p:text>
+  <p:cm authorId="3" dt="2025-09-09T13:10:24.495" idx="1">
+    <p:pos x="1170" y="1534"/>
+    <p:text>oh doch manche mahben tatsächlih 0% fett...</p:text>
     <p:extLst>
       <p:ext uri="{C676402C-5697-4E1C-873F-D02D1690AC5C}">
-        <p15:threadingInfo xmlns:p15="http://schemas.microsoft.com/office/powerpoint/2012/main" timeZoneBias="-120"/>
+        <p15:threadingInfo xmlns:p15="http://schemas.microsoft.com/office/powerpoint/2012/main" timeZoneBias="-120">
+          <p15:parentCm authorId="2" idx="4"/>
+        </p15:threadingInfo>
       </p:ext>
     </p:extLst>
   </p:cm>
 </p:cmLst>
 </file>
 
-<file path=ppt/comments/comment6.xml><?xml version="1.0" encoding="utf-8"?>
+<file path=ppt/comments/comment3.xml><?xml version="1.0" encoding="utf-8"?>
 <p:cmLst xmlns:a="http://schemas.openxmlformats.org/drawingml/2006/main" xmlns:r="http://schemas.openxmlformats.org/officeDocument/2006/relationships" xmlns:p="http://schemas.openxmlformats.org/presentationml/2006/main">
-  <p:cm authorId="2" dt="2025-08-21T09:48:51.484" idx="6">
-    <p:pos x="4146" y="870"/>
-    <p:text>das haben wir beide nicht, wir haben die gleichen Prädiktoren</p:text>
+  <p:cm authorId="2" dt="2025-08-21T09:34:54.586" idx="5">
+    <p:pos x="10" y="10"/>
+    <p:text>Vielleicht könntest du die Formel die rauskommt angeben, als ein zentrales Ergebnis, dass man dann gut mit meinem Ergebnis vergleichen kann?</p:text>
     <p:extLst>
       <p:ext uri="{C676402C-5697-4E1C-873F-D02D1690AC5C}">
         <p15:threadingInfo xmlns:p15="http://schemas.microsoft.com/office/powerpoint/2012/main" timeZoneBias="-120"/>
@@ -7157,7 +7133,9 @@
         </p:nvSpPr>
         <p:spPr/>
         <p:txBody>
-          <a:bodyPr/>
+          <a:bodyPr>
+            <a:normAutofit fontScale="85000" lnSpcReduction="20000"/>
+          </a:bodyPr>
           <a:lstStyle/>
           <a:p>
             <a:r>
@@ -7168,20 +7146,62 @@
               <a:rPr lang="de-DE" dirty="0"/>
             </a:br>
             <a:r>
-              <a:rPr lang="de-DE" dirty="0"/>
-              <a:t>Institute </a:t>
-            </a:r>
-            <a:r>
-              <a:rPr lang="de-DE" dirty="0" err="1"/>
+              <a:rPr lang="de-DE" dirty="0" smtClean="0"/>
+              <a:t>Medical University </a:t>
+            </a:r>
+            <a:r>
+              <a:rPr lang="de-DE" dirty="0" err="1" smtClean="0"/>
               <a:t>of</a:t>
             </a:r>
             <a:r>
+              <a:rPr lang="de-DE" smtClean="0"/>
+              <a:t> Vienna, Institute </a:t>
+            </a:r>
+            <a:r>
+              <a:rPr lang="de-DE" dirty="0" err="1"/>
+              <a:t>of</a:t>
+            </a:r>
+            <a:r>
               <a:rPr lang="de-DE" dirty="0"/>
               <a:t> Clinical </a:t>
             </a:r>
             <a:r>
-              <a:rPr lang="de-DE" dirty="0" err="1"/>
+              <a:rPr lang="de-DE" dirty="0" err="1" smtClean="0"/>
               <a:t>Biometrics</a:t>
+            </a:r>
+            <a:endParaRPr lang="de-DE" dirty="0" smtClean="0"/>
+          </a:p>
+          <a:p>
+            <a:r>
+              <a:rPr lang="de-DE" dirty="0" smtClean="0"/>
+              <a:t>Mariana Nold</a:t>
+            </a:r>
+            <a:br>
+              <a:rPr lang="de-DE" dirty="0" smtClean="0"/>
+            </a:br>
+            <a:r>
+              <a:rPr lang="de-DE" dirty="0" smtClean="0"/>
+              <a:t>University </a:t>
+            </a:r>
+            <a:r>
+              <a:rPr lang="de-DE" dirty="0" err="1" smtClean="0"/>
+              <a:t>of</a:t>
+            </a:r>
+            <a:r>
+              <a:rPr lang="de-DE" dirty="0" smtClean="0"/>
+              <a:t> Jena, Department </a:t>
+            </a:r>
+            <a:r>
+              <a:rPr lang="de-DE" dirty="0" err="1" smtClean="0"/>
+              <a:t>of</a:t>
+            </a:r>
+            <a:r>
+              <a:rPr lang="de-DE" dirty="0" smtClean="0"/>
+              <a:t> </a:t>
+            </a:r>
+            <a:r>
+              <a:rPr lang="de-DE" dirty="0" err="1" smtClean="0"/>
+              <a:t>Socioloy</a:t>
             </a:r>
             <a:endParaRPr lang="de-DE" dirty="0"/>
           </a:p>
@@ -7816,6 +7836,13 @@
   <p:clrMapOvr>
     <a:masterClrMapping/>
   </p:clrMapOvr>
+  <p:timing>
+    <p:tnLst>
+      <p:par>
+        <p:cTn id="1" dur="indefinite" restart="never" nodeType="tmRoot"/>
+      </p:par>
+    </p:tnLst>
+  </p:timing>
 </p:sld>
 </file>
 
@@ -7931,8 +7958,8 @@
           </a:p>
         </p:txBody>
       </p:sp>
-      <mc:AlternateContent xmlns:mc="http://schemas.openxmlformats.org/markup-compatibility/2006" xmlns:a14="http://schemas.microsoft.com/office/drawing/2010/main">
-        <mc:Choice Requires="a14">
+      <mc:AlternateContent xmlns:mc="http://schemas.openxmlformats.org/markup-compatibility/2006">
+        <mc:Choice xmlns:a14="http://schemas.microsoft.com/office/drawing/2010/main" Requires="a14">
           <p:sp>
             <p:nvSpPr>
               <p:cNvPr id="6" name="Inhaltsplatzhalter 5"/>
@@ -8005,9 +8032,10 @@
                   <a:t>explainable</a:t>
                 </a:r>
                 <a:r>
-                  <a:rPr lang="de-DE" dirty="0"/>
-                  <a:t>‘:</a:t>
+                  <a:rPr lang="de-DE" dirty="0" smtClean="0"/>
+                  <a:t>‘):</a:t>
                 </a:r>
+                <a:endParaRPr lang="de-DE" dirty="0"/>
               </a:p>
               <a:p>
                 <a:pPr lvl="1"/>
@@ -8314,7 +8342,7 @@
             </p:txBody>
           </p:sp>
         </mc:Choice>
-        <mc:Fallback xmlns="">
+        <mc:Fallback>
           <p:sp>
             <p:nvSpPr>
               <p:cNvPr id="6" name="Inhaltsplatzhalter 5"/>
@@ -8358,6 +8386,13 @@
   <p:clrMapOvr>
     <a:masterClrMapping/>
   </p:clrMapOvr>
+  <p:timing>
+    <p:tnLst>
+      <p:par>
+        <p:cTn id="1" dur="indefinite" restart="never" nodeType="tmRoot"/>
+      </p:par>
+    </p:tnLst>
+  </p:timing>
 </p:sld>
 </file>
 
@@ -9229,6 +9264,10 @@
               <a:rPr lang="de-DE" dirty="0" err="1"/>
               <a:t>see</a:t>
             </a:r>
+            <a:r>
+              <a:rPr lang="de-DE" dirty="0"/>
+              <a:t/>
+            </a:r>
             <a:br>
               <a:rPr lang="de-DE" dirty="0"/>
             </a:br>
@@ -9265,6 +9304,10 @@
               <a:rPr lang="de-DE" dirty="0" err="1"/>
               <a:t>analysis</a:t>
             </a:r>
+            <a:r>
+              <a:rPr lang="de-DE" dirty="0"/>
+              <a:t/>
+            </a:r>
             <a:br>
               <a:rPr lang="de-DE" dirty="0"/>
             </a:br>
@@ -9313,6 +9356,10 @@
             <a:r>
               <a:rPr lang="de-DE" dirty="0" err="1"/>
               <a:t>our</a:t>
+            </a:r>
+            <a:r>
+              <a:rPr lang="de-DE" dirty="0"/>
+              <a:t/>
             </a:r>
             <a:br>
               <a:rPr lang="de-DE" dirty="0"/>
@@ -9504,7 +9551,7 @@
         </p:blipFill>
         <p:spPr>
           <a:xfrm>
-            <a:off x="756909" y="1000009"/>
+            <a:off x="764767" y="1083002"/>
             <a:ext cx="7269804" cy="4967287"/>
           </a:xfrm>
           <a:prstGeom prst="rect">
@@ -9512,6 +9559,113 @@
           </a:prstGeom>
         </p:spPr>
       </p:pic>
+      <p:sp>
+        <p:nvSpPr>
+          <p:cNvPr id="6" name="Textfeld 5"/>
+          <p:cNvSpPr txBox="1"/>
+          <p:nvPr/>
+        </p:nvSpPr>
+        <p:spPr>
+          <a:xfrm>
+            <a:off x="8801100" y="779318"/>
+            <a:ext cx="2122697" cy="369332"/>
+          </a:xfrm>
+          <a:prstGeom prst="rect">
+            <a:avLst/>
+          </a:prstGeom>
+          <a:noFill/>
+        </p:spPr>
+        <p:txBody>
+          <a:bodyPr wrap="none" rtlCol="0">
+            <a:spAutoFit/>
+          </a:bodyPr>
+          <a:lstStyle/>
+          <a:p>
+            <a:r>
+              <a:rPr lang="de-DE" dirty="0" smtClean="0"/>
+              <a:t>Via </a:t>
+            </a:r>
+            <a:r>
+              <a:rPr lang="de-DE" dirty="0" err="1" smtClean="0"/>
+              <a:t>the</a:t>
+            </a:r>
+            <a:r>
+              <a:rPr lang="de-DE" dirty="0" smtClean="0"/>
+              <a:t> </a:t>
+            </a:r>
+            <a:r>
+              <a:rPr lang="de-DE" dirty="0" err="1" smtClean="0"/>
+              <a:t>bootstrap</a:t>
+            </a:r>
+            <a:endParaRPr lang="de-AT" dirty="0"/>
+          </a:p>
+        </p:txBody>
+      </p:sp>
+      <p:cxnSp>
+        <p:nvCxnSpPr>
+          <p:cNvPr id="9" name="Gerade Verbindung mit Pfeil 8"/>
+          <p:cNvCxnSpPr>
+            <a:stCxn id="6" idx="2"/>
+          </p:cNvCxnSpPr>
+          <p:nvPr/>
+        </p:nvCxnSpPr>
+        <p:spPr>
+          <a:xfrm flipH="1">
+            <a:off x="5970740" y="1148650"/>
+            <a:ext cx="3891709" cy="315343"/>
+          </a:xfrm>
+          <a:prstGeom prst="straightConnector1">
+            <a:avLst/>
+          </a:prstGeom>
+          <a:ln>
+            <a:tailEnd type="triangle"/>
+          </a:ln>
+        </p:spPr>
+        <p:style>
+          <a:lnRef idx="1">
+            <a:schemeClr val="accent1"/>
+          </a:lnRef>
+          <a:fillRef idx="0">
+            <a:schemeClr val="accent1"/>
+          </a:fillRef>
+          <a:effectRef idx="0">
+            <a:schemeClr val="accent1"/>
+          </a:effectRef>
+          <a:fontRef idx="minor">
+            <a:schemeClr val="tx1"/>
+          </a:fontRef>
+        </p:style>
+      </p:cxnSp>
+      <p:cxnSp>
+        <p:nvCxnSpPr>
+          <p:cNvPr id="11" name="Gerader Verbinder 10"/>
+          <p:cNvCxnSpPr/>
+          <p:nvPr/>
+        </p:nvCxnSpPr>
+        <p:spPr>
+          <a:xfrm>
+            <a:off x="4121912" y="1500388"/>
+            <a:ext cx="3697657" cy="0"/>
+          </a:xfrm>
+          <a:prstGeom prst="line">
+            <a:avLst/>
+          </a:prstGeom>
+        </p:spPr>
+        <p:style>
+          <a:lnRef idx="1">
+            <a:schemeClr val="accent1"/>
+          </a:lnRef>
+          <a:fillRef idx="0">
+            <a:schemeClr val="accent1"/>
+          </a:fillRef>
+          <a:effectRef idx="0">
+            <a:schemeClr val="accent1"/>
+          </a:effectRef>
+          <a:fontRef idx="minor">
+            <a:schemeClr val="tx1"/>
+          </a:fontRef>
+        </p:style>
+      </p:cxnSp>
     </p:spTree>
     <p:extLst>
       <p:ext uri="{BB962C8B-B14F-4D97-AF65-F5344CB8AC3E}">
@@ -10010,6 +10164,10 @@
               <a:rPr lang="de-DE" dirty="0" err="1"/>
               <a:t>predictors</a:t>
             </a:r>
+            <a:r>
+              <a:rPr lang="de-DE" dirty="0"/>
+              <a:t/>
+            </a:r>
             <a:br>
               <a:rPr lang="de-DE" dirty="0"/>
             </a:br>
@@ -10502,6 +10660,10 @@
               <a:rPr lang="de-DE" dirty="0"/>
               <a:t>:</a:t>
             </a:r>
+            <a:r>
+              <a:rPr lang="de-AT" dirty="0"/>
+              <a:t/>
+            </a:r>
             <a:br>
               <a:rPr lang="de-AT" dirty="0"/>
             </a:br>
@@ -10537,6 +10699,12 @@
                 <a:sym typeface="Wingdings" panose="05000000000000000000" pitchFamily="2" charset="2"/>
               </a:rPr>
               <a:t>produced</a:t>
+            </a:r>
+            <a:r>
+              <a:rPr lang="de-DE" dirty="0">
+                <a:sym typeface="Wingdings" panose="05000000000000000000" pitchFamily="2" charset="2"/>
+              </a:rPr>
+              <a:t/>
             </a:r>
             <a:br>
               <a:rPr lang="de-DE" dirty="0">
@@ -11330,6 +11498,10 @@
               <a:rPr lang="de-DE" dirty="0" err="1"/>
               <a:t>that</a:t>
             </a:r>
+            <a:r>
+              <a:rPr lang="de-DE" dirty="0"/>
+              <a:t/>
+            </a:r>
             <a:br>
               <a:rPr lang="de-DE" dirty="0"/>
             </a:br>
@@ -11534,6 +11706,10 @@
             <a:r>
               <a:rPr lang="de-DE" dirty="0" err="1"/>
               <a:t>recalibrated</a:t>
+            </a:r>
+            <a:r>
+              <a:rPr lang="de-DE" dirty="0"/>
+              <a:t/>
             </a:r>
             <a:br>
               <a:rPr lang="de-DE" dirty="0"/>
@@ -11900,6 +12076,10 @@
               <a:rPr lang="en-US" dirty="0"/>
               <a:t> </a:t>
             </a:r>
+            <a:r>
+              <a:rPr lang="en-US" b="1" dirty="0"/>
+              <a:t/>
+            </a:r>
             <a:br>
               <a:rPr lang="en-US" b="1" dirty="0"/>
             </a:br>
@@ -12155,6 +12335,10 @@
               <a:rPr lang="en-US" dirty="0"/>
               <a:t>Robustness Analysis – Comparison with Original Study</a:t>
             </a:r>
+            <a:r>
+              <a:rPr lang="en-US" b="1" dirty="0"/>
+              <a:t/>
+            </a:r>
             <a:br>
               <a:rPr lang="en-US" b="1" dirty="0"/>
             </a:br>
@@ -12976,16 +13160,8 @@
           <a:lstStyle/>
           <a:p>
             <a:r>
-              <a:rPr lang="de-DE" dirty="0"/>
-              <a:t>Set </a:t>
-            </a:r>
-            <a:r>
-              <a:rPr lang="de-DE" dirty="0" err="1"/>
-              <a:t>of</a:t>
-            </a:r>
-            <a:r>
-              <a:rPr lang="de-DE" dirty="0"/>
-              <a:t> </a:t>
+              <a:rPr lang="de-DE" dirty="0" smtClean="0"/>
+              <a:t>Agreement in </a:t>
             </a:r>
             <a:r>
               <a:rPr lang="de-DE" dirty="0" err="1"/>
@@ -12993,46 +13169,17 @@
             </a:r>
             <a:r>
               <a:rPr lang="de-DE" dirty="0"/>
-              <a:t> variables different (</a:t>
-            </a:r>
-            <a:r>
-              <a:rPr lang="de-DE" dirty="0" err="1"/>
-              <a:t>Biceps</a:t>
-            </a:r>
-            <a:r>
-              <a:rPr lang="de-DE" dirty="0"/>
-              <a:t> </a:t>
-            </a:r>
-            <a:r>
-              <a:rPr lang="de-DE" dirty="0">
-                <a:sym typeface="Wingdings" panose="05000000000000000000" pitchFamily="2" charset="2"/>
-              </a:rPr>
-              <a:t> </a:t>
-            </a:r>
-            <a:r>
-              <a:rPr lang="de-DE" dirty="0" err="1">
-                <a:sym typeface="Wingdings" panose="05000000000000000000" pitchFamily="2" charset="2"/>
-              </a:rPr>
-              <a:t>Wrist</a:t>
-            </a:r>
-            <a:r>
-              <a:rPr lang="de-DE" dirty="0">
-                <a:sym typeface="Wingdings" panose="05000000000000000000" pitchFamily="2" charset="2"/>
-              </a:rPr>
-              <a:t>)</a:t>
-            </a:r>
-            <a:r>
-              <a:rPr lang="de-DE" dirty="0"/>
-              <a:t> </a:t>
-            </a:r>
-          </a:p>
-          <a:p>
-            <a:r>
-              <a:rPr lang="de-DE" dirty="0" err="1"/>
+              <a:t> variables </a:t>
+            </a:r>
+            <a:endParaRPr lang="de-DE" dirty="0" smtClean="0"/>
+          </a:p>
+          <a:p>
+            <a:r>
+              <a:rPr lang="de-DE" dirty="0" err="1" smtClean="0"/>
               <a:t>Calibration</a:t>
             </a:r>
             <a:r>
-              <a:rPr lang="de-DE" dirty="0"/>
+              <a:rPr lang="de-DE" dirty="0" smtClean="0"/>
               <a:t> </a:t>
             </a:r>
             <a:r>
@@ -13210,6 +13357,10 @@
               <a:rPr lang="de-DE" dirty="0" err="1"/>
               <a:t>unnoticed</a:t>
             </a:r>
+            <a:r>
+              <a:rPr lang="de-DE" dirty="0"/>
+              <a:t/>
+            </a:r>
             <a:br>
               <a:rPr lang="de-DE" dirty="0"/>
             </a:br>
@@ -13700,8 +13851,79 @@
               <a:t> </a:t>
             </a:r>
             <a:r>
-              <a:rPr lang="de-DE" dirty="0" err="1"/>
+              <a:rPr lang="de-DE" dirty="0" err="1" smtClean="0"/>
               <a:t>viewpoint</a:t>
+            </a:r>
+            <a:r>
+              <a:rPr lang="de-DE" dirty="0" smtClean="0"/>
+              <a:t>:</a:t>
+            </a:r>
+            <a:br>
+              <a:rPr lang="de-DE" dirty="0" smtClean="0"/>
+            </a:br>
+            <a:r>
+              <a:rPr lang="de-DE" dirty="0" err="1" smtClean="0"/>
+              <a:t>Bayesian</a:t>
+            </a:r>
+            <a:r>
+              <a:rPr lang="de-DE" dirty="0" smtClean="0"/>
+              <a:t> ‚</a:t>
+            </a:r>
+            <a:r>
+              <a:rPr lang="de-DE" dirty="0" err="1" smtClean="0"/>
+              <a:t>reference</a:t>
+            </a:r>
+            <a:r>
+              <a:rPr lang="de-DE" dirty="0" smtClean="0"/>
+              <a:t> </a:t>
+            </a:r>
+            <a:r>
+              <a:rPr lang="de-DE" dirty="0" err="1" smtClean="0"/>
+              <a:t>model</a:t>
+            </a:r>
+            <a:r>
+              <a:rPr lang="de-DE" dirty="0" smtClean="0"/>
+              <a:t>‘ </a:t>
+            </a:r>
+            <a:r>
+              <a:rPr lang="de-DE" dirty="0" err="1" smtClean="0"/>
+              <a:t>for</a:t>
+            </a:r>
+            <a:r>
+              <a:rPr lang="de-DE" dirty="0" smtClean="0"/>
+              <a:t> </a:t>
+            </a:r>
+            <a:r>
+              <a:rPr lang="de-DE" dirty="0" err="1" smtClean="0"/>
+              <a:t>inference</a:t>
+            </a:r>
+            <a:r>
+              <a:rPr lang="de-DE" dirty="0" smtClean="0"/>
+              <a:t> – </a:t>
+            </a:r>
+            <a:r>
+              <a:rPr lang="de-DE" dirty="0" err="1" smtClean="0"/>
+              <a:t>frequentist</a:t>
+            </a:r>
+            <a:r>
+              <a:rPr lang="de-DE" dirty="0" smtClean="0"/>
+              <a:t> ‚global </a:t>
+            </a:r>
+            <a:r>
+              <a:rPr lang="de-DE" dirty="0" err="1" smtClean="0"/>
+              <a:t>model</a:t>
+            </a:r>
+            <a:r>
+              <a:rPr lang="de-DE" dirty="0" smtClean="0"/>
+              <a:t>‘ (</a:t>
+            </a:r>
+            <a:r>
+              <a:rPr lang="de-DE" dirty="0" err="1" smtClean="0"/>
+              <a:t>see</a:t>
+            </a:r>
+            <a:r>
+              <a:rPr lang="de-DE" dirty="0" smtClean="0"/>
+              <a:t> also Heinze et al, 2018)</a:t>
             </a:r>
             <a:endParaRPr lang="de-AT" dirty="0"/>
           </a:p>
@@ -17371,6 +17593,10 @@
               <a:rPr lang="de-DE" dirty="0" err="1"/>
               <a:t>transportability</a:t>
             </a:r>
+            <a:r>
+              <a:rPr lang="de-DE" dirty="0"/>
+              <a:t/>
+            </a:r>
             <a:br>
               <a:rPr lang="de-DE" dirty="0"/>
             </a:br>
@@ -17624,6 +17850,13 @@
   <p:clrMapOvr>
     <a:masterClrMapping/>
   </p:clrMapOvr>
+  <p:timing>
+    <p:tnLst>
+      <p:par>
+        <p:cTn id="1" dur="indefinite" restart="never" nodeType="tmRoot"/>
+      </p:par>
+    </p:tnLst>
+  </p:timing>
 </p:sld>
 </file>
 
